--- a/07.pptx
+++ b/07.pptx
@@ -216,7 +216,7 @@
           <a:p>
             <a:fld id="{1B711F3E-B30C-42F4-A182-916C2273D750}" type="datetimeFigureOut">
               <a:rPr lang="zh-CN" altLang="en-US" smtClean="0"/>
-              <a:t>2026/7/24</a:t>
+              <a:t>2026/7/27</a:t>
             </a:fld>
             <a:endParaRPr lang="zh-CN" altLang="en-US"/>
           </a:p>
